--- a/slides/chapter_01_section_02_ordered_sets/slides.pptx
+++ b/slides/chapter_01_section_02_ordered_sets/slides.pptx
@@ -535,7 +535,7 @@
           <a:lstStyle/>
           <a:p>
             <a:r>
-              <a:t>Welcome back to the Principles of Mathematical Analysis video series. This is Chapter 1, Section 2: Ordered Sets. In the previous section, we saw that the rational numbers have gaps, and that the set of rationals p with p squared less than 2 has no least upper bound in the rationals. In this section, we will make these ideas precise by defining what it means for a set to be ordered, and what it means for a set to have the least-upper-bound property. Let's begin.</a:t>
+              <a:t>Welcome back to the Principles of Mathematical Analysis video series. This is Chapter 1, Section 2: Ordered Sets. In the previous section, we saw that the rational numbers have gaps, and that the set of rationals "p" with "p" squared less than 2 has no least upper bound in the rationals. In this section, we will make these ideas precise by defining what it means for a set to be ordered, and what it means for a set to have the least-upper-bound property. Let's begin.</a:t>
             </a:r>
           </a:p>
         </p:txBody>
@@ -605,7 +605,7 @@
           <a:lstStyle/>
           <a:p>
             <a:r>
-              <a:t>Here is the definition of an upper bound. Suppose S is an ordered set and E is a subset of S. If there is some element beta in S such that x is less than or equal to beta for every x in E, we say that E is bounded above, and we call beta an upper bound of E. As the diagram shows, upper bounds are elements that sit to the right of the entire set E. Lower bounds are defined symmetrically --- they sit to the left of E. Notice that the bound beta does not need to be in E itself; it just needs to be in S.</a:t>
+              <a:t>Here is the definition of an upper bound. Suppose "S" is an ordered set and "E" is a subset of "S". If there is some element "beta" in "S" such that "x" is less than or equal to "beta" for every "x" in "E", we say that "E" is bounded above, and we call "beta" an upper bound of "E". As the diagram shows, upper bounds are elements that sit to the right of the entire set "E". Lower bounds are defined symmetrically --- they sit to the left of "E". Notice that the bound "beta" does not need to be in "E" itself; it just needs to be in "S".</a:t>
             </a:r>
           </a:p>
         </p:txBody>
@@ -675,7 +675,7 @@
           <a:lstStyle/>
           <a:p>
             <a:r>
-              <a:t>Now we come to one of the most important definitions in this section: the supremum. Suppose E is a subset of an ordered set S and E is bounded above. The supremum of E is an element alpha in S satisfying two conditions. The first condition is that alpha must itself be an upper bound of E. But being an upper bound is not enough --- many elements could be upper bounds. The key is the second condition, which we will see on the next slide.</a:t>
+              <a:t>Now we come to one of the most important definitions in this section: the supremum. Suppose "E" is a subset of an ordered set "S" and "E" is bounded above. The supremum of "E" is an element "alpha" in "S" satisfying two conditions. The first condition is that "alpha" must itself be an upper bound of "E". But being an upper bound is not enough --- many elements could be upper bounds. The key is the second condition, which we will see on the next slide.</a:t>
             </a:r>
           </a:p>
         </p:txBody>
@@ -745,7 +745,7 @@
           <a:lstStyle/>
           <a:p>
             <a:r>
-              <a:t>The second condition says that no element strictly smaller than alpha is an upper bound of E. In other words, alpha is the smallest of all upper bounds. That's why we call it the least upper bound. We write alpha equals sup E. Looking at the diagram, the supremum sits right at the boundary between E and the upper bounds. Any gamma to the left of it fails to be an upper bound because some element of E exceeds it. Notice from condition two that there is at most one supremum, since if two elements both satisfied these conditions, neither could be strictly less than the other.</a:t>
+              <a:t>The second condition says that no element strictly smaller than "alpha" is an upper bound of "E". In other words, "alpha" is the smallest of all upper bounds. That's why we call it the least upper bound. We write "alpha" equals sup "E". Looking at the diagram, the supremum sits right at the boundary between "E" and the upper bounds. Any "gamma" to the left of it fails to be an upper bound because some element of "E" exceeds it. Notice from condition two that there is at most one supremum, since if two elements both satisfied these conditions, neither could be strictly less than the other.</a:t>
             </a:r>
           </a:p>
         </p:txBody>
@@ -815,7 +815,7 @@
           <a:lstStyle/>
           <a:p>
             <a:r>
-              <a:t>The greatest lower bound, or infimum, is defined in the same manner but in the other direction. Alpha equals inf E means that alpha is a lower bound of E, and no beta strictly greater than alpha is a lower bound of E. So the infimum is the largest of all lower bounds. In the diagram, you can see the infimum sitting at the left boundary of E, with all lower bounds to its left. Now let's look at some examples to build intuition.</a:t>
+              <a:t>The greatest lower bound, or infimum, is defined in the same manner but in the other direction. "Alpha" equals inf "E" means that "alpha" is a lower bound of "E", and no "beta" strictly greater than "alpha" is a lower bound of "E". So the infimum is the largest of all lower bounds. In the diagram, you can see the infimum sitting at the left boundary of "E", with all lower bounds to its left. Now let's look at some examples to build intuition.</a:t>
             </a:r>
           </a:p>
         </p:txBody>
@@ -885,7 +885,7 @@
           <a:lstStyle/>
           <a:p>
             <a:r>
-              <a:t>Let's revisit the sets from Example 1.1. The set A consists of all positive rationals whose square is less than 2, and B consists of all positive rationals whose square is greater than 2. On the number line, A lies to the left of the square root of 2, and B lies to the right. But the square root of 2 is not rational, so there is a gap between A and B. No rational number sits at the boundary.</a:t>
+              <a:t>Let's revisit the sets from Example 1.1. The set "A" consists of all positive rationals whose square is less than 2, and "B" consists of all positive rationals whose square is greater than 2. On the number line, "A" lies to the left of the square root of 2, and "B" lies to the right. But the square root of 2 is not rational, so there is a gap between "A" and "B". No rational number sits at the boundary.</a:t>
             </a:r>
           </a:p>
         </p:txBody>
@@ -955,7 +955,7 @@
           <a:lstStyle/>
           <a:p>
             <a:r>
-              <a:t>The upper bounds of A within the rationals are exactly the members of B. Why? Any rational upper bound of A must satisfy p squared greater than or equal to 2, but since no rational has p squared equal to 2, it must satisfy p squared greater than 2, placing it in B. Now, B has no smallest member, as we proved in the introduction. That means there is no least upper bound for A within the rationals. A has no supremum in Q. Similarly, the lower bounds of B consist of all members of A together with all non-positive rationals. Since A has no largest member, B has no greatest lower bound in Q either. This is the fundamental gap that motivates everything that follows.</a:t>
+              <a:t>The upper bounds of "A" within the rationals are exactly the members of "B". Why? Any rational upper bound of "A" must satisfy "p" squared greater than or equal to 2, but since no rational has "p" squared equal to 2, it must satisfy "p" squared greater than 2, placing it in "B". Now, "B" has no smallest member, as we proved in the introduction. That means there is no least upper bound for "A" within the rationals. "A" has no supremum in "Q". Similarly, the lower bounds of "B" consist of all members of "A" together with all non-positive rationals. Since "A" has no largest member, "B" has no greatest lower bound in Q either. This is the fundamental gap that motivates everything that follows.</a:t>
             </a:r>
           </a:p>
         </p:txBody>
@@ -1025,7 +1025,7 @@
           <a:lstStyle/>
           <a:p>
             <a:r>
-              <a:t>An important point: the supremum of a set may or may not actually belong to that set. Consider E sub 1, the set of all rationals strictly less than 0. The supremum is 0, but 0 is not in E sub 1, because we required strict inequality.</a:t>
+              <a:t>An important point: the supremum of a set may or may not actually belong to that set. Consider "E" sub 1, the set of all rationals strictly less than 0. The supremum is 0, but 0 is not in "E" sub 1, because we required strict inequality.</a:t>
             </a:r>
           </a:p>
         </p:txBody>
@@ -1095,7 +1095,7 @@
           <a:lstStyle/>
           <a:p>
             <a:r>
-              <a:t>Now consider E sub 2, the set of all rationals less than or equal to zero. The supremum is again 0, but this time 0 belongs to E sub 2. The open circle on the E sub 1 diagram shows that 0 is excluded, while the filled circle for E sub 2 shows inclusion. Both sets have the same supremum, but membership differs. This is an important subtlety: the supremum need not be an element of the set.</a:t>
+              <a:t>Now consider "E" sub 2, the set of all rationals less than or equal to zero. The supremum is again 0, but this time 0 belongs to "E" sub 2. The open circle on the "E" sub 1 diagram shows that 0 is excluded, while the filled circle for "E" sub 2 shows inclusion. Both sets have the same supremum, but membership differs. This is an important subtlety: the supremum need not be an element of the set.</a:t>
             </a:r>
           </a:p>
         </p:txBody>
@@ -1165,7 +1165,7 @@
           <a:lstStyle/>
           <a:p>
             <a:r>
-              <a:t>Here is another instructive example. Let E be the set of all numbers 1 over n, where n ranges over the positive integers. So E is the set containing 1, one half, one third, one fourth, and so on. The supremum is 1, which is a member of E since 1 equals 1 over 1. The infimum is 0, which is not a member of E because there is no positive integer n with 1 over n equal to 0. The elements of E get closer and closer to 0, accumulating near it, but never reaching it. This example again illustrates that the supremum can belong to the set while the infimum does not, or vice versa.</a:t>
+              <a:t>Here is another instructive example. Let "E" be the set of all numbers 1 over "n", where "n" ranges over the positive integers. So "E" is the set containing 1, one half, one third, one fourth, and so on. The supremum is 1, which is a member of "E" since 1 equals 1 over 1. The infimum is 0, which is not a member of "E" because there is no positive integer "n" with 1 over "n" equal to 0. The elements of "E" get closer and closer to 0, accumulating near it, but never reaching it. This example again illustrates that the supremum can belong to the set while the infimum does not, or vice versa.</a:t>
             </a:r>
           </a:p>
         </p:txBody>
@@ -1235,7 +1235,7 @@
           <a:lstStyle/>
           <a:p>
             <a:r>
-              <a:t>This is one of the most important definitions in the book. An ordered set S has the least-upper-bound property if every nonempty subset of S that is bounded above has a supremum that exists within S. We already saw in Example 1.9 part a that the rationals do not have this property, because the set A of rationals with p squared less than 2 is bounded above but has no supremum in Q. In the next section, we will see that the real numbers are constructed precisely to have this property. But first, let's see an important consequence: the least-upper-bound property implies the greatest-lower-bound property.</a:t>
+              <a:t>This is one of the most important definitions in the book. An ordered set "S" has the least-upper-bound property if every nonempty subset of "S" that is bounded above has a supremum that exists within "S". We already saw in Example 1.9 part "a" that the rationals do not have this property, because the set "A" of rationals with "p" squared less than 2 is bounded above but has no supremum in "Q". In the next section, we will see that the real numbers are constructed precisely to have this property. But first, let's see an important consequence: the least-upper-bound property implies the greatest-lower-bound property.</a:t>
             </a:r>
           </a:p>
         </p:txBody>
@@ -1375,7 +1375,7 @@
           <a:lstStyle/>
           <a:p>
             <a:r>
-              <a:t>Here is Theorem 1.11, which establishes a beautiful connection. If an ordered set S has the least-upper-bound property, then it also has the greatest-lower-bound property. More precisely, if B is a nonempty subset of S that is bounded below, and L is the set of all lower bounds of B, then the supremum of L exists and equals the infimum of B. This means we get greatest lower bounds for free once we have least upper bounds. Let's see why.</a:t>
+              <a:t>Here is Theorem 1.11, which establishes a beautiful connection. If an ordered set "S" has the least-upper-bound property, then it also has the greatest-lower-bound property. More precisely, if "B" is a nonempty subset of "S" that is bounded below, and "L" is the set of all lower bounds of "B", then the supremum of "L" exists and equals the infimum of "B". This means we get greatest lower bounds for free once we have least upper bounds. Let's see why.</a:t>
             </a:r>
           </a:p>
         </p:txBody>
@@ -1445,7 +1445,7 @@
           <a:lstStyle/>
           <a:p>
             <a:r>
-              <a:t>Before we dive into the formal proof, let's understand the strategy. We have the set B, which is bounded below, and L, the set of all lower bounds of B. The picture shows L to the left and B to the right, with alpha at the boundary. Our plan is: first, use the least-upper-bound property to show that sup L exists. Then show that this supremum is actually a lower bound of B, meaning it belongs to L. Finally, show that nothing bigger than alpha is a lower bound of B. That will make alpha the greatest lower bound, the infimum of B.</a:t>
+              <a:t>Before we dive into the formal proof, let's understand the strategy. We have the set "B", which is bounded below, and "L", the set of all lower bounds of "B". The picture shows "L" to the left and "B" to the right, with "alpha" at the boundary. Our plan is: first, use the least-upper-bound property to show that sup "L" exists. Then show that this supremum is actually a lower bound of "B", meaning it belongs to "L". Finally, show that nothing bigger than "alpha" is a lower bound of "B". That will make "alpha" the greatest lower bound, the infimum of "B".</a:t>
             </a:r>
           </a:p>
         </p:txBody>
@@ -1515,7 +1515,7 @@
           <a:lstStyle/>
           <a:p>
             <a:r>
-              <a:t>Let's begin. Since B is bounded below, there exists at least one lower bound, so L is not empty. Now, every element x of B is an upper bound for L. Why? Because L consists of all lower bounds of B, meaning every element of L is less than or equal to every element of B. So every element of B bounds L from above. Since L is nonempty and bounded above, and S has the least-upper-bound property, sup L must exist in S. Call it alpha.</a:t>
+              <a:t>Let's begin. Since "B" is bounded below, there exists at least one lower bound, so "L" is not empty. Now, every element "x" of "B" is an upper bound for "L". Why? Because "L" consists of all lower bounds of "B", meaning every element of "L" is less than or equal to every element of "B". So every element of "B" bounds "L" from above. Since "L" is nonempty and bounded above, and "S" has the least-upper-bound property, sup "L" must exist in "S". Call it "alpha".</a:t>
             </a:r>
           </a:p>
         </p:txBody>
@@ -1585,7 +1585,7 @@
           <a:lstStyle/>
           <a:p>
             <a:r>
-              <a:t>Now we show that alpha is actually a lower bound of B. Take any element x in B. We just showed that x is an upper bound of L. Since alpha is the least upper bound of L, alpha must be less than or equal to x. But x was arbitrary in B. So alpha is less than or equal to every element of B, which means alpha is a lower bound of B. In other words, alpha belongs to L. Now we just need to show that nothing larger than alpha is also a lower bound of B.</a:t>
+              <a:t>Now we show that "alpha" is actually a lower bound of "B". Take any element "x" in "B". We just showed that "x" is an upper bound of "L". Since "alpha" is the least upper bound of "L", "alpha" must be less than or equal to "x". But "x" was arbitrary in "B". So "alpha" is less than or equal to every element of "B", which means "alpha" is a lower bound of "B". In other words, "alpha" belongs to "L". Now we just need to show that nothing larger than "alpha" is also a lower bound of "B".</a:t>
             </a:r>
           </a:p>
         </p:txBody>
@@ -1655,7 +1655,7 @@
           <a:lstStyle/>
           <a:p>
             <a:r>
-              <a:t>Finally, suppose beta is strictly greater than alpha. Since alpha is the supremum of L, every element of L is at most alpha. So if beta were in L, we would need beta less than or equal to alpha, which contradicts beta being strictly greater. Therefore beta is not in L, meaning beta is not a lower bound of B. Putting it all together: alpha is a lower bound of B from Step 2, and no element greater than alpha is a lower bound of B from Step 3. By definition, this means alpha equals the infimum of B. The proof is complete. This elegant argument shows that the least-upper-bound property automatically gives us the greatest-lower-bound property as well.</a:t>
+              <a:t>Finally, suppose "beta" is strictly greater than "alpha". Since "alpha" is the supremum of "L", every element of "L" is at most "alpha". So if "beta" were in "L", we would need "beta" less than or equal to "alpha", which contradicts "beta" being strictly greater. Therefore "beta" is not in "L", meaning "beta" is not a lower bound of "B". Putting it all together: "alpha" is a lower bound of "B" from Step 2, and no element greater than "alpha" is a lower bound of "B" from Step 3. By definition, this means "alpha" equals the infimum of "B". The proof is complete. This elegant argument shows that the least-upper-bound property automatically gives us the greatest-lower-bound property as well.</a:t>
             </a:r>
           </a:p>
         </p:txBody>
@@ -2215,7 +2215,7 @@
           <a:lstStyle/>
           <a:p>
             <a:r>
-              <a:t>Let's define what an order is. An order on a set S is a relation, written with the less-than symbol, satisfying two properties. The first property is called trichotomy: for any two elements x and y in S, exactly one of the three statements x less than y, x equals y, or y less than x is true. There is no ambiguity --- one and only one of these holds.</a:t>
+              <a:t>Let's define what an order is. An order on a set "S" is a relation, written with the less-than symbol, satisfying two properties. The first property is called trichotomy: for any two elements "x" and "y" in "S", exactly one of the three statements "x" less than "y", "x" equals "y", or "y" less than "x" is true. There is no ambiguity --- one and only one of these holds.</a:t>
             </a:r>
           </a:p>
         </p:txBody>
@@ -2285,7 +2285,7 @@
           <a:lstStyle/>
           <a:p>
             <a:r>
-              <a:t>The second property is transitivity. If x is less than y and y is less than z, then x is less than z. This is the familiar chaining property that lets us build up a consistent ordering of elements. Together, trichotomy and transitivity are all we need for an order.</a:t>
+              <a:t>The second property is transitivity. If "x" is less than "y" and "y" is less than "z", then "x" is less than "z". This is the familiar chaining property that lets us build up a consistent ordering of elements. Together, trichotomy and transitivity are all we need for an order.</a:t>
             </a:r>
           </a:p>
         </p:txBody>
@@ -2355,7 +2355,7 @@
           <a:lstStyle/>
           <a:p>
             <a:r>
-              <a:t>A few words about notation. We write y greater than x as a synonym for x less than y. And x less than or equal to y means that either x is strictly less than y, or x equals y. In other words, x less than or equal to y is the negation of x greater than y. Now let's define ordered sets.</a:t>
+              <a:t>A few words about notation. We write "y" greater than "x" as a synonym for "x" less than "y". And "x" less than or equal to "y" means that either "x" is strictly less than "y", or "x" equals "y". In other words, "x" less than or equal to "y" is the negation of "x" greater than "y". Now let's define ordered sets.</a:t>
             </a:r>
           </a:p>
         </p:txBody>
@@ -2425,7 +2425,7 @@
           <a:lstStyle/>
           <a:p>
             <a:r>
-              <a:t>An ordered set is simply a set equipped with an order relation satisfying the two properties we just defined. The most familiar example is the rational numbers, where r is less than s means that s minus r is a positive rational number. You can verify that this relation satisfies both trichotomy and transitivity. Now that we have ordered sets, let's talk about bounds.</a:t>
+              <a:t>An ordered set is simply a set equipped with an order relation satisfying the two properties we just defined. The most familiar example is the rational numbers, where "r" is less than "s" means that "s" minus "r" is a positive rational number. You can verify that this relation satisfies both trichotomy and transitivity. Now that we have ordered sets, let's talk about bounds.</a:t>
             </a:r>
           </a:p>
         </p:txBody>
